--- a/jingcheng OS.pptx
+++ b/jingcheng OS.pptx
@@ -530,10 +530,7 @@
           <a:bodyPr/>
           <a:lstStyle/>
           <a:p>
-            <a:r>
-              <a:rPr lang="zh-CN" altLang="en-US" dirty="0"/>
-              <a:t>主页</a:t>
-            </a:r>
+            <a:endParaRPr lang="zh-CN" altLang="en-US" dirty="0"/>
           </a:p>
         </p:txBody>
       </p:sp>
@@ -617,10 +614,6 @@
           <a:bodyPr/>
           <a:lstStyle/>
           <a:p>
-            <a:r>
-              <a:rPr lang="zh-CN" altLang="en-US" dirty="0"/>
-              <a:t>视频</a:t>
-            </a:r>
             <a:endParaRPr lang="en-US" altLang="zh-CN" dirty="0"/>
           </a:p>
         </p:txBody>
@@ -705,10 +698,7 @@
           <a:bodyPr/>
           <a:lstStyle/>
           <a:p>
-            <a:r>
-              <a:rPr lang="zh-CN" altLang="en-US" dirty="0"/>
-              <a:t>音乐</a:t>
-            </a:r>
+            <a:endParaRPr lang="zh-CN" altLang="en-US" dirty="0"/>
           </a:p>
         </p:txBody>
       </p:sp>
@@ -792,10 +782,7 @@
           <a:bodyPr/>
           <a:lstStyle/>
           <a:p>
-            <a:r>
-              <a:rPr lang="zh-CN" altLang="en-US" dirty="0"/>
-              <a:t>名言</a:t>
-            </a:r>
+            <a:endParaRPr lang="zh-CN" altLang="en-US" dirty="0"/>
           </a:p>
         </p:txBody>
       </p:sp>
@@ -879,14 +866,6 @@
           <a:bodyPr/>
           <a:lstStyle/>
           <a:p>
-            <a:r>
-              <a:rPr lang="zh-CN" altLang="en-US" dirty="0"/>
-              <a:t>名言</a:t>
-            </a:r>
-            <a:r>
-              <a:rPr lang="en-US" altLang="zh-CN" dirty="0"/>
-              <a:t>2</a:t>
-            </a:r>
             <a:endParaRPr lang="zh-CN" altLang="en-US" dirty="0"/>
           </a:p>
         </p:txBody>
@@ -971,10 +950,7 @@
           <a:bodyPr/>
           <a:lstStyle/>
           <a:p>
-            <a:r>
-              <a:rPr lang="zh-CN" altLang="en-US" dirty="0"/>
-              <a:t>尾声</a:t>
-            </a:r>
+            <a:endParaRPr lang="zh-CN" altLang="en-US" dirty="0"/>
           </a:p>
         </p:txBody>
       </p:sp>

--- a/jingcheng OS.pptx
+++ b/jingcheng OS.pptx
@@ -4201,7 +4201,7 @@
         </p:nvSpPr>
         <p:spPr>
           <a:xfrm>
-            <a:off x="1224280" y="-12700"/>
+            <a:off x="1056323" y="-6350"/>
             <a:ext cx="4064000" cy="368300"/>
           </a:xfrm>
           <a:prstGeom prst="rect">
@@ -4216,7 +4216,7 @@
           <a:lstStyle/>
           <a:p>
             <a:r>
-              <a:rPr lang="en-US" altLang="zh-CN" b="1"/>
+              <a:rPr lang="en-US" altLang="zh-CN" b="1" dirty="0"/>
               <a:t>_</a:t>
             </a:r>
           </a:p>
@@ -4667,49 +4667,6 @@
               <a:t>PPT6</a:t>
             </a:r>
             <a:endParaRPr lang="zh-CN" altLang="en-US" dirty="0"/>
-          </a:p>
-        </p:txBody>
-      </p:sp>
-      <p:sp>
-        <p:nvSpPr>
-          <p:cNvPr id="5" name="文本框 4">
-            <a:extLst>
-              <a:ext uri="{FF2B5EF4-FFF2-40B4-BE49-F238E27FC236}">
-                <a16:creationId xmlns:a16="http://schemas.microsoft.com/office/drawing/2014/main" id="{42C936BC-4F86-4372-9E44-19DF1D86066C}"/>
-              </a:ext>
-            </a:extLst>
-          </p:cNvPr>
-          <p:cNvSpPr txBox="1"/>
-          <p:nvPr/>
-        </p:nvSpPr>
-        <p:spPr>
-          <a:xfrm>
-            <a:off x="311986" y="6370880"/>
-            <a:ext cx="1824588" cy="523220"/>
-          </a:xfrm>
-          <a:prstGeom prst="rect">
-            <a:avLst/>
-          </a:prstGeom>
-          <a:noFill/>
-        </p:spPr>
-        <p:txBody>
-          <a:bodyPr wrap="square" rtlCol="0">
-            <a:spAutoFit/>
-          </a:bodyPr>
-          <a:lstStyle/>
-          <a:p>
-            <a:r>
-              <a:rPr lang="zh-CN" altLang="en-US" sz="1400" dirty="0"/>
-              <a:t>版权所有，禁止抄袭</a:t>
-            </a:r>
-            <a:endParaRPr lang="en-US" altLang="zh-CN" sz="1400" dirty="0"/>
-          </a:p>
-          <a:p>
-            <a:r>
-              <a:rPr lang="en-US" altLang="zh-CN" sz="1400" dirty="0"/>
-              <a:t>       2022-2023</a:t>
-            </a:r>
-            <a:endParaRPr lang="zh-CN" altLang="en-US" sz="1400" dirty="0"/>
           </a:p>
         </p:txBody>
       </p:sp>
@@ -5135,39 +5092,6 @@
           </a:prstGeom>
         </p:spPr>
       </p:pic>
-      <p:sp>
-        <p:nvSpPr>
-          <p:cNvPr id="15" name="文本框 14"/>
-          <p:cNvSpPr txBox="1"/>
-          <p:nvPr>
-            <p:custDataLst>
-              <p:tags r:id="rId7"/>
-            </p:custDataLst>
-          </p:nvPr>
-        </p:nvSpPr>
-        <p:spPr>
-          <a:xfrm>
-            <a:off x="1221105" y="-12700"/>
-            <a:ext cx="4064000" cy="368300"/>
-          </a:xfrm>
-          <a:prstGeom prst="rect">
-            <a:avLst/>
-          </a:prstGeom>
-          <a:noFill/>
-        </p:spPr>
-        <p:txBody>
-          <a:bodyPr wrap="square" rtlCol="0">
-            <a:spAutoFit/>
-          </a:bodyPr>
-          <a:lstStyle/>
-          <a:p>
-            <a:r>
-              <a:rPr lang="en-US" altLang="zh-CN" b="1"/>
-              <a:t>_</a:t>
-            </a:r>
-          </a:p>
-        </p:txBody>
-      </p:sp>
       <p:pic>
         <p:nvPicPr>
           <p:cNvPr id="17" name="图片 16" descr="C:\Users\xiati\Downloads\音乐.png音乐"/>
@@ -5176,7 +5100,7 @@
           </p:cNvPicPr>
           <p:nvPr>
             <p:custDataLst>
-              <p:tags r:id="rId8"/>
+              <p:tags r:id="rId7"/>
             </p:custDataLst>
           </p:nvPr>
         </p:nvPicPr>
@@ -5207,7 +5131,7 @@
           </p:cNvPicPr>
           <p:nvPr>
             <p:custDataLst>
-              <p:tags r:id="rId9"/>
+              <p:tags r:id="rId8"/>
             </p:custDataLst>
           </p:nvPr>
         </p:nvPicPr>
@@ -5241,7 +5165,7 @@
           </p:cNvPicPr>
           <p:nvPr>
             <p:custDataLst>
-              <p:tags r:id="rId10"/>
+              <p:tags r:id="rId9"/>
             </p:custDataLst>
           </p:nvPr>
         </p:nvPicPr>
@@ -5280,7 +5204,7 @@
           </p:cNvPicPr>
           <p:nvPr>
             <p:custDataLst>
-              <p:tags r:id="rId11"/>
+              <p:tags r:id="rId10"/>
             </p:custDataLst>
           </p:nvPr>
         </p:nvPicPr>
@@ -5319,7 +5243,7 @@
           </p:cNvPicPr>
           <p:nvPr>
             <p:custDataLst>
-              <p:tags r:id="rId12"/>
+              <p:tags r:id="rId11"/>
             </p:custDataLst>
           </p:nvPr>
         </p:nvPicPr>
@@ -5356,7 +5280,7 @@
           <p:cNvSpPr txBox="1"/>
           <p:nvPr>
             <p:custDataLst>
-              <p:tags r:id="rId13"/>
+              <p:tags r:id="rId12"/>
             </p:custDataLst>
           </p:nvPr>
         </p:nvSpPr>
@@ -5396,7 +5320,7 @@
           <p:cNvSpPr txBox="1"/>
           <p:nvPr>
             <p:custDataLst>
-              <p:tags r:id="rId14"/>
+              <p:tags r:id="rId13"/>
             </p:custDataLst>
           </p:nvPr>
         </p:nvSpPr>
@@ -5436,7 +5360,7 @@
           <p:cNvSpPr txBox="1"/>
           <p:nvPr>
             <p:custDataLst>
-              <p:tags r:id="rId15"/>
+              <p:tags r:id="rId14"/>
             </p:custDataLst>
           </p:nvPr>
         </p:nvSpPr>
@@ -5476,7 +5400,7 @@
           <p:cNvSpPr txBox="1"/>
           <p:nvPr>
             <p:custDataLst>
-              <p:tags r:id="rId16"/>
+              <p:tags r:id="rId15"/>
             </p:custDataLst>
           </p:nvPr>
         </p:nvSpPr>
@@ -5516,7 +5440,7 @@
           <p:cNvSpPr txBox="1"/>
           <p:nvPr>
             <p:custDataLst>
-              <p:tags r:id="rId17"/>
+              <p:tags r:id="rId16"/>
             </p:custDataLst>
           </p:nvPr>
         </p:nvSpPr>
@@ -5556,7 +5480,7 @@
           <p:cNvSpPr txBox="1"/>
           <p:nvPr>
             <p:custDataLst>
-              <p:tags r:id="rId18"/>
+              <p:tags r:id="rId17"/>
             </p:custDataLst>
           </p:nvPr>
         </p:nvSpPr>
@@ -5581,6 +5505,45 @@
               <a:t>PPT6</a:t>
             </a:r>
             <a:endParaRPr lang="zh-CN" altLang="en-US" dirty="0"/>
+          </a:p>
+        </p:txBody>
+      </p:sp>
+      <p:sp>
+        <p:nvSpPr>
+          <p:cNvPr id="24" name="文本框 23">
+            <a:extLst>
+              <a:ext uri="{FF2B5EF4-FFF2-40B4-BE49-F238E27FC236}">
+                <a16:creationId xmlns:a16="http://schemas.microsoft.com/office/drawing/2014/main" id="{D398CC2A-A06B-4C46-BCF1-EB346E52D142}"/>
+              </a:ext>
+            </a:extLst>
+          </p:cNvPr>
+          <p:cNvSpPr txBox="1"/>
+          <p:nvPr>
+            <p:custDataLst>
+              <p:tags r:id="rId18"/>
+            </p:custDataLst>
+          </p:nvPr>
+        </p:nvSpPr>
+        <p:spPr>
+          <a:xfrm>
+            <a:off x="1056323" y="-6350"/>
+            <a:ext cx="4064000" cy="368300"/>
+          </a:xfrm>
+          <a:prstGeom prst="rect">
+            <a:avLst/>
+          </a:prstGeom>
+          <a:noFill/>
+        </p:spPr>
+        <p:txBody>
+          <a:bodyPr wrap="square" rtlCol="0">
+            <a:spAutoFit/>
+          </a:bodyPr>
+          <a:lstStyle/>
+          <a:p>
+            <a:r>
+              <a:rPr lang="en-US" altLang="zh-CN" b="1" dirty="0"/>
+              <a:t>_</a:t>
+            </a:r>
           </a:p>
         </p:txBody>
       </p:sp>
@@ -5998,44 +5961,11 @@
       </p:sp>
       <p:sp>
         <p:nvSpPr>
-          <p:cNvPr id="15" name="文本框 14"/>
-          <p:cNvSpPr txBox="1"/>
-          <p:nvPr>
-            <p:custDataLst>
-              <p:tags r:id="rId6"/>
-            </p:custDataLst>
-          </p:nvPr>
-        </p:nvSpPr>
-        <p:spPr>
-          <a:xfrm>
-            <a:off x="1221105" y="-12700"/>
-            <a:ext cx="4064000" cy="368300"/>
-          </a:xfrm>
-          <a:prstGeom prst="rect">
-            <a:avLst/>
-          </a:prstGeom>
-          <a:noFill/>
-        </p:spPr>
-        <p:txBody>
-          <a:bodyPr wrap="square" rtlCol="0">
-            <a:spAutoFit/>
-          </a:bodyPr>
-          <a:lstStyle/>
-          <a:p>
-            <a:r>
-              <a:rPr lang="en-US" altLang="zh-CN" b="1"/>
-              <a:t>_</a:t>
-            </a:r>
-          </a:p>
-        </p:txBody>
-      </p:sp>
-      <p:sp>
-        <p:nvSpPr>
           <p:cNvPr id="21" name="圆角矩形 20"/>
           <p:cNvSpPr/>
           <p:nvPr>
             <p:custDataLst>
-              <p:tags r:id="rId7"/>
+              <p:tags r:id="rId6"/>
             </p:custDataLst>
           </p:nvPr>
         </p:nvSpPr>
@@ -6089,7 +6019,7 @@
           </p:cNvPicPr>
           <p:nvPr>
             <p:custDataLst>
-              <p:tags r:id="rId8"/>
+              <p:tags r:id="rId7"/>
             </p:custDataLst>
           </p:nvPr>
         </p:nvPicPr>
@@ -6120,7 +6050,7 @@
           </p:cNvPicPr>
           <p:nvPr>
             <p:custDataLst>
-              <p:tags r:id="rId9"/>
+              <p:tags r:id="rId8"/>
             </p:custDataLst>
           </p:nvPr>
         </p:nvPicPr>
@@ -6154,7 +6084,7 @@
           </p:cNvPicPr>
           <p:nvPr>
             <p:custDataLst>
-              <p:tags r:id="rId10"/>
+              <p:tags r:id="rId9"/>
             </p:custDataLst>
           </p:nvPr>
         </p:nvPicPr>
@@ -6193,7 +6123,7 @@
           </p:cNvPicPr>
           <p:nvPr>
             <p:custDataLst>
-              <p:tags r:id="rId11"/>
+              <p:tags r:id="rId10"/>
             </p:custDataLst>
           </p:nvPr>
         </p:nvPicPr>
@@ -6232,7 +6162,7 @@
           </p:cNvPicPr>
           <p:nvPr>
             <p:custDataLst>
-              <p:tags r:id="rId12"/>
+              <p:tags r:id="rId11"/>
             </p:custDataLst>
           </p:nvPr>
         </p:nvPicPr>
@@ -6269,7 +6199,7 @@
           <p:cNvSpPr txBox="1"/>
           <p:nvPr>
             <p:custDataLst>
-              <p:tags r:id="rId13"/>
+              <p:tags r:id="rId12"/>
             </p:custDataLst>
           </p:nvPr>
         </p:nvSpPr>
@@ -6309,7 +6239,7 @@
           <p:cNvSpPr txBox="1"/>
           <p:nvPr>
             <p:custDataLst>
-              <p:tags r:id="rId14"/>
+              <p:tags r:id="rId13"/>
             </p:custDataLst>
           </p:nvPr>
         </p:nvSpPr>
@@ -6349,7 +6279,7 @@
           <p:cNvSpPr txBox="1"/>
           <p:nvPr>
             <p:custDataLst>
-              <p:tags r:id="rId15"/>
+              <p:tags r:id="rId14"/>
             </p:custDataLst>
           </p:nvPr>
         </p:nvSpPr>
@@ -6389,7 +6319,7 @@
           <p:cNvSpPr txBox="1"/>
           <p:nvPr>
             <p:custDataLst>
-              <p:tags r:id="rId16"/>
+              <p:tags r:id="rId15"/>
             </p:custDataLst>
           </p:nvPr>
         </p:nvSpPr>
@@ -6429,7 +6359,7 @@
           <p:cNvSpPr txBox="1"/>
           <p:nvPr>
             <p:custDataLst>
-              <p:tags r:id="rId17"/>
+              <p:tags r:id="rId16"/>
             </p:custDataLst>
           </p:nvPr>
         </p:nvSpPr>
@@ -6469,7 +6399,7 @@
           <p:cNvSpPr txBox="1"/>
           <p:nvPr>
             <p:custDataLst>
-              <p:tags r:id="rId18"/>
+              <p:tags r:id="rId17"/>
             </p:custDataLst>
           </p:nvPr>
         </p:nvSpPr>
@@ -6494,6 +6424,45 @@
               <a:t>PPT6</a:t>
             </a:r>
             <a:endParaRPr lang="zh-CN" altLang="en-US" dirty="0"/>
+          </a:p>
+        </p:txBody>
+      </p:sp>
+      <p:sp>
+        <p:nvSpPr>
+          <p:cNvPr id="20" name="文本框 19">
+            <a:extLst>
+              <a:ext uri="{FF2B5EF4-FFF2-40B4-BE49-F238E27FC236}">
+                <a16:creationId xmlns:a16="http://schemas.microsoft.com/office/drawing/2014/main" id="{3296329A-D2A9-4FE5-90D8-2183EED72D7D}"/>
+              </a:ext>
+            </a:extLst>
+          </p:cNvPr>
+          <p:cNvSpPr txBox="1"/>
+          <p:nvPr>
+            <p:custDataLst>
+              <p:tags r:id="rId18"/>
+            </p:custDataLst>
+          </p:nvPr>
+        </p:nvSpPr>
+        <p:spPr>
+          <a:xfrm>
+            <a:off x="1056323" y="-6350"/>
+            <a:ext cx="4064000" cy="368300"/>
+          </a:xfrm>
+          <a:prstGeom prst="rect">
+            <a:avLst/>
+          </a:prstGeom>
+          <a:noFill/>
+        </p:spPr>
+        <p:txBody>
+          <a:bodyPr wrap="square" rtlCol="0">
+            <a:spAutoFit/>
+          </a:bodyPr>
+          <a:lstStyle/>
+          <a:p>
+            <a:r>
+              <a:rPr lang="en-US" altLang="zh-CN" b="1" dirty="0"/>
+              <a:t>_</a:t>
+            </a:r>
           </a:p>
         </p:txBody>
       </p:sp>
@@ -6806,45 +6775,6 @@
       </p:pic>
       <p:sp>
         <p:nvSpPr>
-          <p:cNvPr id="7" name="文本框 6">
-            <a:extLst>
-              <a:ext uri="{FF2B5EF4-FFF2-40B4-BE49-F238E27FC236}">
-                <a16:creationId xmlns:a16="http://schemas.microsoft.com/office/drawing/2014/main" id="{296FBE20-7F4F-4FF2-905C-5490466991A2}"/>
-              </a:ext>
-            </a:extLst>
-          </p:cNvPr>
-          <p:cNvSpPr txBox="1"/>
-          <p:nvPr>
-            <p:custDataLst>
-              <p:tags r:id="rId4"/>
-            </p:custDataLst>
-          </p:nvPr>
-        </p:nvSpPr>
-        <p:spPr>
-          <a:xfrm>
-            <a:off x="1221105" y="-12700"/>
-            <a:ext cx="4064000" cy="368300"/>
-          </a:xfrm>
-          <a:prstGeom prst="rect">
-            <a:avLst/>
-          </a:prstGeom>
-          <a:noFill/>
-        </p:spPr>
-        <p:txBody>
-          <a:bodyPr wrap="square" rtlCol="0">
-            <a:spAutoFit/>
-          </a:bodyPr>
-          <a:lstStyle/>
-          <a:p>
-            <a:r>
-              <a:rPr lang="en-US" altLang="zh-CN" b="1"/>
-              <a:t>_</a:t>
-            </a:r>
-          </a:p>
-        </p:txBody>
-      </p:sp>
-      <p:sp>
-        <p:nvSpPr>
           <p:cNvPr id="8" name="文本框 7">
             <a:extLst>
               <a:ext uri="{FF2B5EF4-FFF2-40B4-BE49-F238E27FC236}">
@@ -6855,7 +6785,7 @@
           <p:cNvSpPr txBox="1"/>
           <p:nvPr>
             <p:custDataLst>
-              <p:tags r:id="rId5"/>
+              <p:tags r:id="rId4"/>
             </p:custDataLst>
           </p:nvPr>
         </p:nvSpPr>
@@ -6959,7 +6889,7 @@
           </p:cNvPicPr>
           <p:nvPr>
             <p:custDataLst>
-              <p:tags r:id="rId6"/>
+              <p:tags r:id="rId5"/>
             </p:custDataLst>
           </p:nvPr>
         </p:nvPicPr>
@@ -6993,7 +6923,7 @@
           </p:cNvPicPr>
           <p:nvPr>
             <p:custDataLst>
-              <p:tags r:id="rId7"/>
+              <p:tags r:id="rId6"/>
             </p:custDataLst>
           </p:nvPr>
         </p:nvPicPr>
@@ -7027,7 +6957,7 @@
           </p:cNvPicPr>
           <p:nvPr>
             <p:custDataLst>
-              <p:tags r:id="rId8"/>
+              <p:tags r:id="rId7"/>
             </p:custDataLst>
           </p:nvPr>
         </p:nvPicPr>
@@ -7060,7 +6990,7 @@
           <p:cNvSpPr/>
           <p:nvPr>
             <p:custDataLst>
-              <p:tags r:id="rId9"/>
+              <p:tags r:id="rId8"/>
             </p:custDataLst>
           </p:nvPr>
         </p:nvSpPr>
@@ -7120,7 +7050,7 @@
           </p:cNvPicPr>
           <p:nvPr>
             <p:custDataLst>
-              <p:tags r:id="rId10"/>
+              <p:tags r:id="rId9"/>
             </p:custDataLst>
           </p:nvPr>
         </p:nvPicPr>
@@ -7159,7 +7089,7 @@
           </p:cNvPicPr>
           <p:nvPr>
             <p:custDataLst>
-              <p:tags r:id="rId11"/>
+              <p:tags r:id="rId10"/>
             </p:custDataLst>
           </p:nvPr>
         </p:nvPicPr>
@@ -7198,7 +7128,7 @@
           </p:cNvPicPr>
           <p:nvPr>
             <p:custDataLst>
-              <p:tags r:id="rId12"/>
+              <p:tags r:id="rId11"/>
             </p:custDataLst>
           </p:nvPr>
         </p:nvPicPr>
@@ -7235,7 +7165,7 @@
           <p:cNvSpPr txBox="1"/>
           <p:nvPr>
             <p:custDataLst>
-              <p:tags r:id="rId13"/>
+              <p:tags r:id="rId12"/>
             </p:custDataLst>
           </p:nvPr>
         </p:nvSpPr>
@@ -7275,7 +7205,7 @@
           <p:cNvSpPr txBox="1"/>
           <p:nvPr>
             <p:custDataLst>
-              <p:tags r:id="rId14"/>
+              <p:tags r:id="rId13"/>
             </p:custDataLst>
           </p:nvPr>
         </p:nvSpPr>
@@ -7315,7 +7245,7 @@
           <p:cNvSpPr txBox="1"/>
           <p:nvPr>
             <p:custDataLst>
-              <p:tags r:id="rId15"/>
+              <p:tags r:id="rId14"/>
             </p:custDataLst>
           </p:nvPr>
         </p:nvSpPr>
@@ -7355,7 +7285,7 @@
           <p:cNvSpPr txBox="1"/>
           <p:nvPr>
             <p:custDataLst>
-              <p:tags r:id="rId16"/>
+              <p:tags r:id="rId15"/>
             </p:custDataLst>
           </p:nvPr>
         </p:nvSpPr>
@@ -7395,7 +7325,7 @@
           <p:cNvSpPr txBox="1"/>
           <p:nvPr>
             <p:custDataLst>
-              <p:tags r:id="rId17"/>
+              <p:tags r:id="rId16"/>
             </p:custDataLst>
           </p:nvPr>
         </p:nvSpPr>
@@ -7435,7 +7365,7 @@
           <p:cNvSpPr txBox="1"/>
           <p:nvPr>
             <p:custDataLst>
-              <p:tags r:id="rId18"/>
+              <p:tags r:id="rId17"/>
             </p:custDataLst>
           </p:nvPr>
         </p:nvSpPr>
@@ -7460,6 +7390,45 @@
               <a:t>PPT6</a:t>
             </a:r>
             <a:endParaRPr lang="zh-CN" altLang="en-US" dirty="0"/>
+          </a:p>
+        </p:txBody>
+      </p:sp>
+      <p:sp>
+        <p:nvSpPr>
+          <p:cNvPr id="21" name="文本框 20">
+            <a:extLst>
+              <a:ext uri="{FF2B5EF4-FFF2-40B4-BE49-F238E27FC236}">
+                <a16:creationId xmlns:a16="http://schemas.microsoft.com/office/drawing/2014/main" id="{2B98F49C-B6BE-4865-8E2D-401945C21320}"/>
+              </a:ext>
+            </a:extLst>
+          </p:cNvPr>
+          <p:cNvSpPr txBox="1"/>
+          <p:nvPr>
+            <p:custDataLst>
+              <p:tags r:id="rId18"/>
+            </p:custDataLst>
+          </p:nvPr>
+        </p:nvSpPr>
+        <p:spPr>
+          <a:xfrm>
+            <a:off x="1056323" y="-6350"/>
+            <a:ext cx="4064000" cy="368300"/>
+          </a:xfrm>
+          <a:prstGeom prst="rect">
+            <a:avLst/>
+          </a:prstGeom>
+          <a:noFill/>
+        </p:spPr>
+        <p:txBody>
+          <a:bodyPr wrap="square" rtlCol="0">
+            <a:spAutoFit/>
+          </a:bodyPr>
+          <a:lstStyle/>
+          <a:p>
+            <a:r>
+              <a:rPr lang="en-US" altLang="zh-CN" b="1" dirty="0"/>
+              <a:t>_</a:t>
+            </a:r>
           </a:p>
         </p:txBody>
       </p:sp>
@@ -7868,45 +7837,6 @@
           </a:p>
         </p:txBody>
       </p:sp>
-      <p:sp>
-        <p:nvSpPr>
-          <p:cNvPr id="13" name="文本框 12">
-            <a:extLst>
-              <a:ext uri="{FF2B5EF4-FFF2-40B4-BE49-F238E27FC236}">
-                <a16:creationId xmlns:a16="http://schemas.microsoft.com/office/drawing/2014/main" id="{492CB3CA-4929-4575-BC90-D025C749FC5B}"/>
-              </a:ext>
-            </a:extLst>
-          </p:cNvPr>
-          <p:cNvSpPr txBox="1"/>
-          <p:nvPr>
-            <p:custDataLst>
-              <p:tags r:id="rId5"/>
-            </p:custDataLst>
-          </p:nvPr>
-        </p:nvSpPr>
-        <p:spPr>
-          <a:xfrm>
-            <a:off x="1221105" y="-12700"/>
-            <a:ext cx="4064000" cy="368300"/>
-          </a:xfrm>
-          <a:prstGeom prst="rect">
-            <a:avLst/>
-          </a:prstGeom>
-          <a:noFill/>
-        </p:spPr>
-        <p:txBody>
-          <a:bodyPr wrap="square" rtlCol="0">
-            <a:spAutoFit/>
-          </a:bodyPr>
-          <a:lstStyle/>
-          <a:p>
-            <a:r>
-              <a:rPr lang="en-US" altLang="zh-CN" b="1"/>
-              <a:t>_</a:t>
-            </a:r>
-          </a:p>
-        </p:txBody>
-      </p:sp>
       <p:pic>
         <p:nvPicPr>
           <p:cNvPr id="14" name="图片 13" descr="主页">
@@ -7921,7 +7851,7 @@
           </p:cNvPicPr>
           <p:nvPr>
             <p:custDataLst>
-              <p:tags r:id="rId6"/>
+              <p:tags r:id="rId5"/>
             </p:custDataLst>
           </p:nvPr>
         </p:nvPicPr>
@@ -7955,7 +7885,7 @@
           </p:cNvPicPr>
           <p:nvPr>
             <p:custDataLst>
-              <p:tags r:id="rId7"/>
+              <p:tags r:id="rId6"/>
             </p:custDataLst>
           </p:nvPr>
         </p:nvPicPr>
@@ -7989,7 +7919,7 @@
           </p:cNvPicPr>
           <p:nvPr>
             <p:custDataLst>
-              <p:tags r:id="rId8"/>
+              <p:tags r:id="rId7"/>
             </p:custDataLst>
           </p:nvPr>
         </p:nvPicPr>
@@ -8025,7 +7955,7 @@
           </p:cNvPicPr>
           <p:nvPr>
             <p:custDataLst>
-              <p:tags r:id="rId9"/>
+              <p:tags r:id="rId8"/>
             </p:custDataLst>
           </p:nvPr>
         </p:nvPicPr>
@@ -8059,7 +7989,7 @@
           </p:cNvPicPr>
           <p:nvPr>
             <p:custDataLst>
-              <p:tags r:id="rId10"/>
+              <p:tags r:id="rId9"/>
             </p:custDataLst>
           </p:nvPr>
         </p:nvPicPr>
@@ -8096,7 +8026,7 @@
           <p:cNvSpPr/>
           <p:nvPr>
             <p:custDataLst>
-              <p:tags r:id="rId11"/>
+              <p:tags r:id="rId10"/>
             </p:custDataLst>
           </p:nvPr>
         </p:nvSpPr>
@@ -8156,7 +8086,7 @@
           </p:cNvPicPr>
           <p:nvPr>
             <p:custDataLst>
-              <p:tags r:id="rId12"/>
+              <p:tags r:id="rId11"/>
             </p:custDataLst>
           </p:nvPr>
         </p:nvPicPr>
@@ -8193,7 +8123,7 @@
           <p:cNvSpPr txBox="1"/>
           <p:nvPr>
             <p:custDataLst>
-              <p:tags r:id="rId13"/>
+              <p:tags r:id="rId12"/>
             </p:custDataLst>
           </p:nvPr>
         </p:nvSpPr>
@@ -8233,7 +8163,7 @@
           <p:cNvSpPr txBox="1"/>
           <p:nvPr>
             <p:custDataLst>
-              <p:tags r:id="rId14"/>
+              <p:tags r:id="rId13"/>
             </p:custDataLst>
           </p:nvPr>
         </p:nvSpPr>
@@ -8273,7 +8203,7 @@
           <p:cNvSpPr txBox="1"/>
           <p:nvPr>
             <p:custDataLst>
-              <p:tags r:id="rId15"/>
+              <p:tags r:id="rId14"/>
             </p:custDataLst>
           </p:nvPr>
         </p:nvSpPr>
@@ -8313,7 +8243,7 @@
           <p:cNvSpPr txBox="1"/>
           <p:nvPr>
             <p:custDataLst>
-              <p:tags r:id="rId16"/>
+              <p:tags r:id="rId15"/>
             </p:custDataLst>
           </p:nvPr>
         </p:nvSpPr>
@@ -8353,7 +8283,7 @@
           <p:cNvSpPr txBox="1"/>
           <p:nvPr>
             <p:custDataLst>
-              <p:tags r:id="rId17"/>
+              <p:tags r:id="rId16"/>
             </p:custDataLst>
           </p:nvPr>
         </p:nvSpPr>
@@ -8393,7 +8323,7 @@
           <p:cNvSpPr txBox="1"/>
           <p:nvPr>
             <p:custDataLst>
-              <p:tags r:id="rId18"/>
+              <p:tags r:id="rId17"/>
             </p:custDataLst>
           </p:nvPr>
         </p:nvSpPr>
@@ -8418,6 +8348,45 @@
               <a:t>PPT6</a:t>
             </a:r>
             <a:endParaRPr lang="zh-CN" altLang="en-US" dirty="0"/>
+          </a:p>
+        </p:txBody>
+      </p:sp>
+      <p:sp>
+        <p:nvSpPr>
+          <p:cNvPr id="21" name="文本框 20">
+            <a:extLst>
+              <a:ext uri="{FF2B5EF4-FFF2-40B4-BE49-F238E27FC236}">
+                <a16:creationId xmlns:a16="http://schemas.microsoft.com/office/drawing/2014/main" id="{7C3E6037-2DA3-4978-827A-85800045F56D}"/>
+              </a:ext>
+            </a:extLst>
+          </p:cNvPr>
+          <p:cNvSpPr txBox="1"/>
+          <p:nvPr>
+            <p:custDataLst>
+              <p:tags r:id="rId18"/>
+            </p:custDataLst>
+          </p:nvPr>
+        </p:nvSpPr>
+        <p:spPr>
+          <a:xfrm>
+            <a:off x="1056323" y="-6350"/>
+            <a:ext cx="4064000" cy="368300"/>
+          </a:xfrm>
+          <a:prstGeom prst="rect">
+            <a:avLst/>
+          </a:prstGeom>
+          <a:noFill/>
+        </p:spPr>
+        <p:txBody>
+          <a:bodyPr wrap="square" rtlCol="0">
+            <a:spAutoFit/>
+          </a:bodyPr>
+          <a:lstStyle/>
+          <a:p>
+            <a:r>
+              <a:rPr lang="en-US" altLang="zh-CN" b="1" dirty="0"/>
+              <a:t>_</a:t>
+            </a:r>
           </a:p>
         </p:txBody>
       </p:sp>
@@ -8787,45 +8756,6 @@
           </a:p>
         </p:txBody>
       </p:sp>
-      <p:sp>
-        <p:nvSpPr>
-          <p:cNvPr id="11" name="文本框 10">
-            <a:extLst>
-              <a:ext uri="{FF2B5EF4-FFF2-40B4-BE49-F238E27FC236}">
-                <a16:creationId xmlns:a16="http://schemas.microsoft.com/office/drawing/2014/main" id="{2271C94B-7E31-450C-8865-5C8D2C786B6B}"/>
-              </a:ext>
-            </a:extLst>
-          </p:cNvPr>
-          <p:cNvSpPr txBox="1"/>
-          <p:nvPr>
-            <p:custDataLst>
-              <p:tags r:id="rId4"/>
-            </p:custDataLst>
-          </p:nvPr>
-        </p:nvSpPr>
-        <p:spPr>
-          <a:xfrm>
-            <a:off x="1221105" y="-12700"/>
-            <a:ext cx="4064000" cy="368300"/>
-          </a:xfrm>
-          <a:prstGeom prst="rect">
-            <a:avLst/>
-          </a:prstGeom>
-          <a:noFill/>
-        </p:spPr>
-        <p:txBody>
-          <a:bodyPr wrap="square" rtlCol="0">
-            <a:spAutoFit/>
-          </a:bodyPr>
-          <a:lstStyle/>
-          <a:p>
-            <a:r>
-              <a:rPr lang="en-US" altLang="zh-CN" b="1"/>
-              <a:t>_</a:t>
-            </a:r>
-          </a:p>
-        </p:txBody>
-      </p:sp>
       <p:pic>
         <p:nvPicPr>
           <p:cNvPr id="12" name="图片 11" descr="系统返回">
@@ -8841,7 +8771,7 @@
           </p:cNvPicPr>
           <p:nvPr>
             <p:custDataLst>
-              <p:tags r:id="rId5"/>
+              <p:tags r:id="rId4"/>
             </p:custDataLst>
           </p:nvPr>
         </p:nvPicPr>
@@ -8875,7 +8805,7 @@
           </p:cNvPicPr>
           <p:nvPr>
             <p:custDataLst>
-              <p:tags r:id="rId6"/>
+              <p:tags r:id="rId5"/>
             </p:custDataLst>
           </p:nvPr>
         </p:nvPicPr>
@@ -8909,7 +8839,7 @@
           </p:cNvPicPr>
           <p:nvPr>
             <p:custDataLst>
-              <p:tags r:id="rId7"/>
+              <p:tags r:id="rId6"/>
             </p:custDataLst>
           </p:nvPr>
         </p:nvPicPr>
@@ -8943,7 +8873,7 @@
           </p:cNvPicPr>
           <p:nvPr>
             <p:custDataLst>
-              <p:tags r:id="rId8"/>
+              <p:tags r:id="rId7"/>
             </p:custDataLst>
           </p:nvPr>
         </p:nvPicPr>
@@ -8978,7 +8908,7 @@
           </p:cNvPicPr>
           <p:nvPr>
             <p:custDataLst>
-              <p:tags r:id="rId9"/>
+              <p:tags r:id="rId8"/>
             </p:custDataLst>
           </p:nvPr>
         </p:nvPicPr>
@@ -9017,7 +8947,7 @@
           </p:cNvPicPr>
           <p:nvPr>
             <p:custDataLst>
-              <p:tags r:id="rId10"/>
+              <p:tags r:id="rId9"/>
             </p:custDataLst>
           </p:nvPr>
         </p:nvPicPr>
@@ -9056,7 +8986,7 @@
           </p:cNvPicPr>
           <p:nvPr>
             <p:custDataLst>
-              <p:tags r:id="rId11"/>
+              <p:tags r:id="rId10"/>
             </p:custDataLst>
           </p:nvPr>
         </p:nvPicPr>
@@ -9093,7 +9023,7 @@
           <p:cNvSpPr/>
           <p:nvPr>
             <p:custDataLst>
-              <p:tags r:id="rId12"/>
+              <p:tags r:id="rId11"/>
             </p:custDataLst>
           </p:nvPr>
         </p:nvSpPr>
@@ -9151,7 +9081,7 @@
           <p:cNvSpPr txBox="1"/>
           <p:nvPr>
             <p:custDataLst>
-              <p:tags r:id="rId13"/>
+              <p:tags r:id="rId12"/>
             </p:custDataLst>
           </p:nvPr>
         </p:nvSpPr>
@@ -9191,7 +9121,7 @@
           <p:cNvSpPr txBox="1"/>
           <p:nvPr>
             <p:custDataLst>
-              <p:tags r:id="rId14"/>
+              <p:tags r:id="rId13"/>
             </p:custDataLst>
           </p:nvPr>
         </p:nvSpPr>
@@ -9231,7 +9161,7 @@
           <p:cNvSpPr txBox="1"/>
           <p:nvPr>
             <p:custDataLst>
-              <p:tags r:id="rId15"/>
+              <p:tags r:id="rId14"/>
             </p:custDataLst>
           </p:nvPr>
         </p:nvSpPr>
@@ -9271,7 +9201,7 @@
           <p:cNvSpPr txBox="1"/>
           <p:nvPr>
             <p:custDataLst>
-              <p:tags r:id="rId16"/>
+              <p:tags r:id="rId15"/>
             </p:custDataLst>
           </p:nvPr>
         </p:nvSpPr>
@@ -9311,7 +9241,7 @@
           <p:cNvSpPr txBox="1"/>
           <p:nvPr>
             <p:custDataLst>
-              <p:tags r:id="rId17"/>
+              <p:tags r:id="rId16"/>
             </p:custDataLst>
           </p:nvPr>
         </p:nvSpPr>
@@ -9351,7 +9281,7 @@
           <p:cNvSpPr txBox="1"/>
           <p:nvPr>
             <p:custDataLst>
-              <p:tags r:id="rId18"/>
+              <p:tags r:id="rId17"/>
             </p:custDataLst>
           </p:nvPr>
         </p:nvSpPr>
@@ -9376,6 +9306,45 @@
               <a:t>PPT6</a:t>
             </a:r>
             <a:endParaRPr lang="zh-CN" altLang="en-US" dirty="0"/>
+          </a:p>
+        </p:txBody>
+      </p:sp>
+      <p:sp>
+        <p:nvSpPr>
+          <p:cNvPr id="20" name="文本框 19">
+            <a:extLst>
+              <a:ext uri="{FF2B5EF4-FFF2-40B4-BE49-F238E27FC236}">
+                <a16:creationId xmlns:a16="http://schemas.microsoft.com/office/drawing/2014/main" id="{CA7AED5C-590B-4AA8-B34E-2972E887A13E}"/>
+              </a:ext>
+            </a:extLst>
+          </p:cNvPr>
+          <p:cNvSpPr txBox="1"/>
+          <p:nvPr>
+            <p:custDataLst>
+              <p:tags r:id="rId18"/>
+            </p:custDataLst>
+          </p:nvPr>
+        </p:nvSpPr>
+        <p:spPr>
+          <a:xfrm>
+            <a:off x="1056323" y="-6350"/>
+            <a:ext cx="4064000" cy="368300"/>
+          </a:xfrm>
+          <a:prstGeom prst="rect">
+            <a:avLst/>
+          </a:prstGeom>
+          <a:noFill/>
+        </p:spPr>
+        <p:txBody>
+          <a:bodyPr wrap="square" rtlCol="0">
+            <a:spAutoFit/>
+          </a:bodyPr>
+          <a:lstStyle/>
+          <a:p>
+            <a:r>
+              <a:rPr lang="en-US" altLang="zh-CN" b="1" dirty="0"/>
+              <a:t>_</a:t>
+            </a:r>
           </a:p>
         </p:txBody>
       </p:sp>
@@ -9548,7 +9517,6 @@
   <p:tag name="KSO_WM_UNIT_MEDIACOVER_RGB" val="000000"/>
   <p:tag name="KSO_WM_UNIT_MEDIACOVER_TRANSPARENCY" val="0.5"/>
   <p:tag name="KSO_WM_UNIT_MEDIACOVER_TEXT" val=""/>
-  <p:tag name="KSO_WM_BEAUTIFY_FLAG" val=""/>
 </p:tagLst>
 </file>
 
@@ -9806,7 +9774,6 @@
   <p:tag name="KSO_WM_UNIT_MEDIACOVER_RGB" val="000000"/>
   <p:tag name="KSO_WM_UNIT_MEDIACOVER_TRANSPARENCY" val="0.5"/>
   <p:tag name="KSO_WM_UNIT_MEDIACOVER_TEXT" val=""/>
-  <p:tag name="KSO_WM_BEAUTIFY_FLAG" val=""/>
 </p:tagLst>
 </file>
 
@@ -9868,24 +9835,10 @@
   <p:tag name="KSO_WM_UNIT_MEDIACOVER_RGB" val="000000"/>
   <p:tag name="KSO_WM_UNIT_MEDIACOVER_TRANSPARENCY" val="0.5"/>
   <p:tag name="KSO_WM_UNIT_MEDIACOVER_TEXT" val=""/>
-  <p:tag name="KSO_WM_BEAUTIFY_FLAG" val=""/>
 </p:tagLst>
 </file>
 
 <file path=ppt/tags/tag123.xml><?xml version="1.0" encoding="utf-8"?>
-<p:tagLst xmlns:a="http://schemas.openxmlformats.org/drawingml/2006/main" xmlns:r="http://schemas.openxmlformats.org/officeDocument/2006/relationships" xmlns:p="http://schemas.openxmlformats.org/presentationml/2006/main">
-  <p:tag name="KSO_WM_UNIT_MEDIACOVER_STYLEID" val="1"/>
-  <p:tag name="KSO_WM_UNIT_MEDIACOVER_TEXTSTATE" val="0"/>
-  <p:tag name="KSO_WM_UNIT_MEDIACOVER_BTN_STATE" val="1"/>
-  <p:tag name="KSO_WM_UNIT_MEDIACOVER_BTN_POS" val="c"/>
-  <p:tag name="KSO_WM_UNIT_MEDIACOVER_BTN_STYLE" val="ee0bc779c1f3d7f3e90c96344320e69a"/>
-  <p:tag name="KSO_WM_UNIT_MEDIACOVER_RGB" val="000000"/>
-  <p:tag name="KSO_WM_UNIT_MEDIACOVER_TRANSPARENCY" val="0.5"/>
-  <p:tag name="KSO_WM_UNIT_MEDIACOVER_TEXT" val=""/>
-</p:tagLst>
-</file>
-
-<file path=ppt/tags/tag124.xml><?xml version="1.0" encoding="utf-8"?>
 <p:tagLst xmlns:a="http://schemas.openxmlformats.org/drawingml/2006/main" xmlns:r="http://schemas.openxmlformats.org/officeDocument/2006/relationships" xmlns:p="http://schemas.openxmlformats.org/presentationml/2006/main">
   <p:tag name="KSO_WM_UNIT_MEDIACOVER_STYLEID" val="1"/>
   <p:tag name="KSO_WM_UNIT_MEDIACOVER_TEXTSTATE" val="0"/>
@@ -9899,7 +9852,7 @@
 </p:tagLst>
 </file>
 
-<file path=ppt/tags/tag125.xml><?xml version="1.0" encoding="utf-8"?>
+<file path=ppt/tags/tag124.xml><?xml version="1.0" encoding="utf-8"?>
 <p:tagLst xmlns:a="http://schemas.openxmlformats.org/drawingml/2006/main" xmlns:r="http://schemas.openxmlformats.org/officeDocument/2006/relationships" xmlns:p="http://schemas.openxmlformats.org/presentationml/2006/main">
   <p:tag name="KSO_WM_UNIT_MEDIACOVER_STYLEID" val="1"/>
   <p:tag name="KSO_WM_UNIT_MEDIACOVER_TEXTSTATE" val="0"/>
@@ -9913,7 +9866,7 @@
 </p:tagLst>
 </file>
 
-<file path=ppt/tags/tag126.xml><?xml version="1.0" encoding="utf-8"?>
+<file path=ppt/tags/tag125.xml><?xml version="1.0" encoding="utf-8"?>
 <p:tagLst xmlns:a="http://schemas.openxmlformats.org/drawingml/2006/main" xmlns:r="http://schemas.openxmlformats.org/officeDocument/2006/relationships" xmlns:p="http://schemas.openxmlformats.org/presentationml/2006/main">
   <p:tag name="KSO_WM_UNIT_MEDIACOVER_STYLEID" val="1"/>
   <p:tag name="KSO_WM_UNIT_MEDIACOVER_TEXTSTATE" val="0"/>
@@ -9927,7 +9880,7 @@
 </p:tagLst>
 </file>
 
-<file path=ppt/tags/tag127.xml><?xml version="1.0" encoding="utf-8"?>
+<file path=ppt/tags/tag126.xml><?xml version="1.0" encoding="utf-8"?>
 <p:tagLst xmlns:a="http://schemas.openxmlformats.org/drawingml/2006/main" xmlns:r="http://schemas.openxmlformats.org/officeDocument/2006/relationships" xmlns:p="http://schemas.openxmlformats.org/presentationml/2006/main">
   <p:tag name="KSO_WM_UNIT_MEDIACOVER_STYLEID" val="1"/>
   <p:tag name="KSO_WM_UNIT_MEDIACOVER_TEXTSTATE" val="0"/>
@@ -9941,7 +9894,7 @@
 </p:tagLst>
 </file>
 
-<file path=ppt/tags/tag128.xml><?xml version="1.0" encoding="utf-8"?>
+<file path=ppt/tags/tag127.xml><?xml version="1.0" encoding="utf-8"?>
 <p:tagLst xmlns:a="http://schemas.openxmlformats.org/drawingml/2006/main" xmlns:r="http://schemas.openxmlformats.org/officeDocument/2006/relationships" xmlns:p="http://schemas.openxmlformats.org/presentationml/2006/main">
   <p:tag name="KSO_WM_UNIT_MEDIACOVER_STYLEID" val="1"/>
   <p:tag name="KSO_WM_UNIT_MEDIACOVER_TEXTSTATE" val="0"/>
@@ -9955,7 +9908,7 @@
 </p:tagLst>
 </file>
 
-<file path=ppt/tags/tag129.xml><?xml version="1.0" encoding="utf-8"?>
+<file path=ppt/tags/tag128.xml><?xml version="1.0" encoding="utf-8"?>
 <p:tagLst xmlns:a="http://schemas.openxmlformats.org/drawingml/2006/main" xmlns:r="http://schemas.openxmlformats.org/officeDocument/2006/relationships" xmlns:p="http://schemas.openxmlformats.org/presentationml/2006/main">
   <p:tag name="KSO_WM_UNIT_MEDIACOVER_STYLEID" val="1"/>
   <p:tag name="KSO_WM_UNIT_MEDIACOVER_TEXTSTATE" val="0"/>
@@ -9969,20 +9922,7 @@
 </p:tagLst>
 </file>
 
-<file path=ppt/tags/tag13.xml><?xml version="1.0" encoding="utf-8"?>
-<p:tagLst xmlns:a="http://schemas.openxmlformats.org/drawingml/2006/main" xmlns:r="http://schemas.openxmlformats.org/officeDocument/2006/relationships" xmlns:p="http://schemas.openxmlformats.org/presentationml/2006/main">
-  <p:tag name="KSO_WM_UNIT_HIGHLIGHT" val="0"/>
-  <p:tag name="KSO_WM_UNIT_COMPATIBLE" val="0"/>
-  <p:tag name="KSO_WM_UNIT_DIAGRAM_ISNUMVISUAL" val="0"/>
-  <p:tag name="KSO_WM_UNIT_DIAGRAM_ISREFERUNIT" val="0"/>
-  <p:tag name="KSO_WM_UNIT_ID" val="_2**"/>
-  <p:tag name="KSO_WM_UNIT_LAYERLEVEL" val="1"/>
-  <p:tag name="KSO_WM_TAG_VERSION" val="1.0"/>
-  <p:tag name="KSO_WM_BEAUTIFY_FLAG" val="#wm#"/>
-</p:tagLst>
-</file>
-
-<file path=ppt/tags/tag130.xml><?xml version="1.0" encoding="utf-8"?>
+<file path=ppt/tags/tag129.xml><?xml version="1.0" encoding="utf-8"?>
 <p:tagLst xmlns:a="http://schemas.openxmlformats.org/drawingml/2006/main" xmlns:r="http://schemas.openxmlformats.org/officeDocument/2006/relationships" xmlns:p="http://schemas.openxmlformats.org/presentationml/2006/main">
   <p:tag name="KSO_WM_UNIT_MEDIACOVER_STYLEID" val="1"/>
   <p:tag name="KSO_WM_UNIT_MEDIACOVER_TEXTSTATE" val="0"/>
@@ -9996,7 +9936,20 @@
 </p:tagLst>
 </file>
 
-<file path=ppt/tags/tag131.xml><?xml version="1.0" encoding="utf-8"?>
+<file path=ppt/tags/tag13.xml><?xml version="1.0" encoding="utf-8"?>
+<p:tagLst xmlns:a="http://schemas.openxmlformats.org/drawingml/2006/main" xmlns:r="http://schemas.openxmlformats.org/officeDocument/2006/relationships" xmlns:p="http://schemas.openxmlformats.org/presentationml/2006/main">
+  <p:tag name="KSO_WM_UNIT_HIGHLIGHT" val="0"/>
+  <p:tag name="KSO_WM_UNIT_COMPATIBLE" val="0"/>
+  <p:tag name="KSO_WM_UNIT_DIAGRAM_ISNUMVISUAL" val="0"/>
+  <p:tag name="KSO_WM_UNIT_DIAGRAM_ISREFERUNIT" val="0"/>
+  <p:tag name="KSO_WM_UNIT_ID" val="_2**"/>
+  <p:tag name="KSO_WM_UNIT_LAYERLEVEL" val="1"/>
+  <p:tag name="KSO_WM_TAG_VERSION" val="1.0"/>
+  <p:tag name="KSO_WM_BEAUTIFY_FLAG" val="#wm#"/>
+</p:tagLst>
+</file>
+
+<file path=ppt/tags/tag130.xml><?xml version="1.0" encoding="utf-8"?>
 <p:tagLst xmlns:a="http://schemas.openxmlformats.org/drawingml/2006/main" xmlns:r="http://schemas.openxmlformats.org/officeDocument/2006/relationships" xmlns:p="http://schemas.openxmlformats.org/presentationml/2006/main">
   <p:tag name="KSO_WM_UNIT_MEDIACOVER_STYLEID" val="1"/>
   <p:tag name="KSO_WM_UNIT_MEDIACOVER_TEXTSTATE" val="0"/>
@@ -10010,7 +9963,7 @@
 </p:tagLst>
 </file>
 
-<file path=ppt/tags/tag132.xml><?xml version="1.0" encoding="utf-8"?>
+<file path=ppt/tags/tag131.xml><?xml version="1.0" encoding="utf-8"?>
 <p:tagLst xmlns:a="http://schemas.openxmlformats.org/drawingml/2006/main" xmlns:r="http://schemas.openxmlformats.org/officeDocument/2006/relationships" xmlns:p="http://schemas.openxmlformats.org/presentationml/2006/main">
   <p:tag name="KSO_WM_UNIT_MEDIACOVER_STYLEID" val="1"/>
   <p:tag name="KSO_WM_UNIT_MEDIACOVER_TEXTSTATE" val="0"/>
@@ -10024,7 +9977,7 @@
 </p:tagLst>
 </file>
 
-<file path=ppt/tags/tag133.xml><?xml version="1.0" encoding="utf-8"?>
+<file path=ppt/tags/tag132.xml><?xml version="1.0" encoding="utf-8"?>
 <p:tagLst xmlns:a="http://schemas.openxmlformats.org/drawingml/2006/main" xmlns:r="http://schemas.openxmlformats.org/officeDocument/2006/relationships" xmlns:p="http://schemas.openxmlformats.org/presentationml/2006/main">
   <p:tag name="KSO_WM_UNIT_MEDIACOVER_STYLEID" val="1"/>
   <p:tag name="KSO_WM_UNIT_MEDIACOVER_TEXTSTATE" val="0"/>
@@ -10038,7 +9991,7 @@
 </p:tagLst>
 </file>
 
-<file path=ppt/tags/tag134.xml><?xml version="1.0" encoding="utf-8"?>
+<file path=ppt/tags/tag133.xml><?xml version="1.0" encoding="utf-8"?>
 <p:tagLst xmlns:a="http://schemas.openxmlformats.org/drawingml/2006/main" xmlns:r="http://schemas.openxmlformats.org/officeDocument/2006/relationships" xmlns:p="http://schemas.openxmlformats.org/presentationml/2006/main">
   <p:tag name="KSO_WM_UNIT_MEDIACOVER_STYLEID" val="1"/>
   <p:tag name="KSO_WM_UNIT_MEDIACOVER_TEXTSTATE" val="0"/>
@@ -10052,7 +10005,7 @@
 </p:tagLst>
 </file>
 
-<file path=ppt/tags/tag135.xml><?xml version="1.0" encoding="utf-8"?>
+<file path=ppt/tags/tag134.xml><?xml version="1.0" encoding="utf-8"?>
 <p:tagLst xmlns:a="http://schemas.openxmlformats.org/drawingml/2006/main" xmlns:r="http://schemas.openxmlformats.org/officeDocument/2006/relationships" xmlns:p="http://schemas.openxmlformats.org/presentationml/2006/main">
   <p:tag name="KSO_WM_UNIT_MEDIACOVER_STYLEID" val="1"/>
   <p:tag name="KSO_WM_UNIT_MEDIACOVER_TEXTSTATE" val="0"/>
@@ -10066,7 +10019,7 @@
 </p:tagLst>
 </file>
 
-<file path=ppt/tags/tag136.xml><?xml version="1.0" encoding="utf-8"?>
+<file path=ppt/tags/tag135.xml><?xml version="1.0" encoding="utf-8"?>
 <p:tagLst xmlns:a="http://schemas.openxmlformats.org/drawingml/2006/main" xmlns:r="http://schemas.openxmlformats.org/officeDocument/2006/relationships" xmlns:p="http://schemas.openxmlformats.org/presentationml/2006/main">
   <p:tag name="KSO_WM_UNIT_MEDIACOVER_STYLEID" val="1"/>
   <p:tag name="KSO_WM_UNIT_MEDIACOVER_TEXTSTATE" val="0"/>
@@ -10080,6 +10033,19 @@
 </p:tagLst>
 </file>
 
+<file path=ppt/tags/tag136.xml><?xml version="1.0" encoding="utf-8"?>
+<p:tagLst xmlns:a="http://schemas.openxmlformats.org/drawingml/2006/main" xmlns:r="http://schemas.openxmlformats.org/officeDocument/2006/relationships" xmlns:p="http://schemas.openxmlformats.org/presentationml/2006/main">
+  <p:tag name="KSO_WM_UNIT_MEDIACOVER_STYLEID" val="1"/>
+  <p:tag name="KSO_WM_UNIT_MEDIACOVER_TEXTSTATE" val="0"/>
+  <p:tag name="KSO_WM_UNIT_MEDIACOVER_BTN_STATE" val="1"/>
+  <p:tag name="KSO_WM_UNIT_MEDIACOVER_BTN_POS" val="c"/>
+  <p:tag name="KSO_WM_UNIT_MEDIACOVER_BTN_STYLE" val="ee0bc779c1f3d7f3e90c96344320e69a"/>
+  <p:tag name="KSO_WM_UNIT_MEDIACOVER_RGB" val="000000"/>
+  <p:tag name="KSO_WM_UNIT_MEDIACOVER_TRANSPARENCY" val="0.5"/>
+  <p:tag name="KSO_WM_UNIT_MEDIACOVER_TEXT" val=""/>
+</p:tagLst>
+</file>
+
 <file path=ppt/tags/tag137.xml><?xml version="1.0" encoding="utf-8"?>
 <p:tagLst xmlns:a="http://schemas.openxmlformats.org/drawingml/2006/main" xmlns:r="http://schemas.openxmlformats.org/officeDocument/2006/relationships" xmlns:p="http://schemas.openxmlformats.org/presentationml/2006/main">
   <p:tag name="KSO_WM_BEAUTIFY_FLAG" val="#wm#"/>
@@ -10346,7 +10312,6 @@
   <p:tag name="KSO_WM_UNIT_MEDIACOVER_RGB" val="000000"/>
   <p:tag name="KSO_WM_UNIT_MEDIACOVER_TRANSPARENCY" val="0.5"/>
   <p:tag name="KSO_WM_UNIT_MEDIACOVER_TEXT" val=""/>
-  <p:tag name="KSO_WM_BEAUTIFY_FLAG" val=""/>
 </p:tagLst>
 </file>
 
@@ -10616,7 +10581,6 @@
   <p:tag name="KSO_WM_UNIT_MEDIACOVER_RGB" val="000000"/>
   <p:tag name="KSO_WM_UNIT_MEDIACOVER_TRANSPARENCY" val="0.5"/>
   <p:tag name="KSO_WM_UNIT_MEDIACOVER_TEXT" val=""/>
-  <p:tag name="KSO_WM_BEAUTIFY_FLAG" val=""/>
 </p:tagLst>
 </file>
 
@@ -11707,7 +11671,6 @@
   <p:tag name="KSO_WM_UNIT_MEDIACOVER_RGB" val="000000"/>
   <p:tag name="KSO_WM_UNIT_MEDIACOVER_TRANSPARENCY" val="0.5"/>
   <p:tag name="KSO_WM_UNIT_MEDIACOVER_TEXT" val=""/>
-  <p:tag name="KSO_WM_BEAUTIFY_FLAG" val=""/>
 </p:tagLst>
 </file>
 
@@ -11721,6 +11684,7 @@
   <p:tag name="KSO_WM_UNIT_MEDIACOVER_RGB" val="000000"/>
   <p:tag name="KSO_WM_UNIT_MEDIACOVER_TRANSPARENCY" val="0.5"/>
   <p:tag name="KSO_WM_UNIT_MEDIACOVER_TEXT" val=""/>
+  <p:tag name="KSO_WM_BEAUTIFY_FLAG" val=""/>
 </p:tagLst>
 </file>
 
